--- a/ゲーム科1年/01_後期/プログラミングⅢ/18_配列とリストの違い.pptx
+++ b/ゲーム科1年/01_後期/プログラミングⅢ/18_配列とリストの違い.pptx
@@ -269,7 +269,7 @@
           <a:p>
             <a:fld id="{E9CC885B-4903-4D54-9A93-00025F12DED9}" type="datetimeFigureOut">
               <a:rPr kumimoji="1" lang="ja-JP" altLang="en-US" smtClean="0"/>
-              <a:t>2024/11/12</a:t>
+              <a:t>2025/3/3</a:t>
             </a:fld>
             <a:endParaRPr kumimoji="1" lang="ja-JP" altLang="en-US"/>
           </a:p>
@@ -499,7 +499,7 @@
           <a:p>
             <a:fld id="{E9CC885B-4903-4D54-9A93-00025F12DED9}" type="datetimeFigureOut">
               <a:rPr kumimoji="1" lang="ja-JP" altLang="en-US" smtClean="0"/>
-              <a:t>2024/11/12</a:t>
+              <a:t>2025/3/3</a:t>
             </a:fld>
             <a:endParaRPr kumimoji="1" lang="ja-JP" altLang="en-US"/>
           </a:p>
@@ -739,7 +739,7 @@
           <a:p>
             <a:fld id="{E9CC885B-4903-4D54-9A93-00025F12DED9}" type="datetimeFigureOut">
               <a:rPr kumimoji="1" lang="ja-JP" altLang="en-US" smtClean="0"/>
-              <a:t>2024/11/12</a:t>
+              <a:t>2025/3/3</a:t>
             </a:fld>
             <a:endParaRPr kumimoji="1" lang="ja-JP" altLang="en-US"/>
           </a:p>
@@ -969,7 +969,7 @@
           <a:p>
             <a:fld id="{E9CC885B-4903-4D54-9A93-00025F12DED9}" type="datetimeFigureOut">
               <a:rPr kumimoji="1" lang="ja-JP" altLang="en-US" smtClean="0"/>
-              <a:t>2024/11/12</a:t>
+              <a:t>2025/3/3</a:t>
             </a:fld>
             <a:endParaRPr kumimoji="1" lang="ja-JP" altLang="en-US"/>
           </a:p>
@@ -1244,7 +1244,7 @@
           <a:p>
             <a:fld id="{E9CC885B-4903-4D54-9A93-00025F12DED9}" type="datetimeFigureOut">
               <a:rPr kumimoji="1" lang="ja-JP" altLang="en-US" smtClean="0"/>
-              <a:t>2024/11/12</a:t>
+              <a:t>2025/3/3</a:t>
             </a:fld>
             <a:endParaRPr kumimoji="1" lang="ja-JP" altLang="en-US"/>
           </a:p>
@@ -1573,7 +1573,7 @@
           <a:p>
             <a:fld id="{E9CC885B-4903-4D54-9A93-00025F12DED9}" type="datetimeFigureOut">
               <a:rPr kumimoji="1" lang="ja-JP" altLang="en-US" smtClean="0"/>
-              <a:t>2024/11/12</a:t>
+              <a:t>2025/3/3</a:t>
             </a:fld>
             <a:endParaRPr kumimoji="1" lang="ja-JP" altLang="en-US"/>
           </a:p>
@@ -2049,7 +2049,7 @@
           <a:p>
             <a:fld id="{E9CC885B-4903-4D54-9A93-00025F12DED9}" type="datetimeFigureOut">
               <a:rPr kumimoji="1" lang="ja-JP" altLang="en-US" smtClean="0"/>
-              <a:t>2024/11/12</a:t>
+              <a:t>2025/3/3</a:t>
             </a:fld>
             <a:endParaRPr kumimoji="1" lang="ja-JP" altLang="en-US"/>
           </a:p>
@@ -2190,7 +2190,7 @@
           <a:p>
             <a:fld id="{E9CC885B-4903-4D54-9A93-00025F12DED9}" type="datetimeFigureOut">
               <a:rPr kumimoji="1" lang="ja-JP" altLang="en-US" smtClean="0"/>
-              <a:t>2024/11/12</a:t>
+              <a:t>2025/3/3</a:t>
             </a:fld>
             <a:endParaRPr kumimoji="1" lang="ja-JP" altLang="en-US"/>
           </a:p>
@@ -2303,7 +2303,7 @@
           <a:p>
             <a:fld id="{E9CC885B-4903-4D54-9A93-00025F12DED9}" type="datetimeFigureOut">
               <a:rPr kumimoji="1" lang="ja-JP" altLang="en-US" smtClean="0"/>
-              <a:t>2024/11/12</a:t>
+              <a:t>2025/3/3</a:t>
             </a:fld>
             <a:endParaRPr kumimoji="1" lang="ja-JP" altLang="en-US"/>
           </a:p>
@@ -2646,7 +2646,7 @@
           <a:p>
             <a:fld id="{E9CC885B-4903-4D54-9A93-00025F12DED9}" type="datetimeFigureOut">
               <a:rPr kumimoji="1" lang="ja-JP" altLang="en-US" smtClean="0"/>
-              <a:t>2024/11/12</a:t>
+              <a:t>2025/3/3</a:t>
             </a:fld>
             <a:endParaRPr kumimoji="1" lang="ja-JP" altLang="en-US"/>
           </a:p>
@@ -2934,7 +2934,7 @@
           <a:p>
             <a:fld id="{E9CC885B-4903-4D54-9A93-00025F12DED9}" type="datetimeFigureOut">
               <a:rPr kumimoji="1" lang="ja-JP" altLang="en-US" smtClean="0"/>
-              <a:t>2024/11/12</a:t>
+              <a:t>2025/3/3</a:t>
             </a:fld>
             <a:endParaRPr kumimoji="1" lang="ja-JP" altLang="en-US"/>
           </a:p>
@@ -3207,7 +3207,7 @@
           <a:p>
             <a:fld id="{E9CC885B-4903-4D54-9A93-00025F12DED9}" type="datetimeFigureOut">
               <a:rPr kumimoji="1" lang="ja-JP" altLang="en-US" smtClean="0"/>
-              <a:t>2024/11/12</a:t>
+              <a:t>2025/3/3</a:t>
             </a:fld>
             <a:endParaRPr kumimoji="1" lang="ja-JP" altLang="en-US"/>
           </a:p>
@@ -6474,14 +6474,38 @@
           <a:p>
             <a:r>
               <a:rPr lang="ja-JP" altLang="en-US" sz="2400" dirty="0"/>
-              <a:t>そのため処理も早く、メモリも最小限に抑えられます。</a:t>
-            </a:r>
-            <a:endParaRPr lang="en-US" altLang="ja-JP" sz="2400" dirty="0"/>
+              <a:t>そのため</a:t>
+            </a:r>
+            <a:r>
+              <a:rPr lang="ja-JP" altLang="en-US" sz="2400" b="1" dirty="0">
+                <a:solidFill>
+                  <a:srgbClr val="FF0000"/>
+                </a:solidFill>
+              </a:rPr>
+              <a:t>処理も速く、メモリも最小限に抑えられます。</a:t>
+            </a:r>
+            <a:endParaRPr lang="en-US" altLang="ja-JP" sz="2400" b="1" dirty="0">
+              <a:solidFill>
+                <a:srgbClr val="FF0000"/>
+              </a:solidFill>
+            </a:endParaRPr>
           </a:p>
           <a:p>
             <a:r>
               <a:rPr lang="ja-JP" altLang="en-US" sz="2400" dirty="0"/>
-              <a:t>アクセスも添え字で簡単に参照できます。</a:t>
+              <a:t>アクセスも</a:t>
+            </a:r>
+            <a:r>
+              <a:rPr lang="ja-JP" altLang="en-US" sz="2400" b="1" dirty="0">
+                <a:solidFill>
+                  <a:srgbClr val="FF0000"/>
+                </a:solidFill>
+              </a:rPr>
+              <a:t>添え字で簡単に参照</a:t>
+            </a:r>
+            <a:r>
+              <a:rPr lang="ja-JP" altLang="en-US" sz="2400" dirty="0"/>
+              <a:t>できます。</a:t>
             </a:r>
             <a:endParaRPr lang="en-US" altLang="ja-JP" sz="2400" dirty="0"/>
           </a:p>
@@ -7799,7 +7823,19 @@
           <a:p>
             <a:r>
               <a:rPr lang="ja-JP" altLang="en-US" sz="2400" dirty="0"/>
-              <a:t>リストは要素を紐づけで繋ぐ仕組みになります。</a:t>
+              <a:t>リストは</a:t>
+            </a:r>
+            <a:r>
+              <a:rPr lang="ja-JP" altLang="en-US" sz="2400" b="1" dirty="0">
+                <a:solidFill>
+                  <a:srgbClr val="FF0000"/>
+                </a:solidFill>
+              </a:rPr>
+              <a:t>要素を紐づけで繋ぐ</a:t>
+            </a:r>
+            <a:r>
+              <a:rPr lang="ja-JP" altLang="en-US" sz="2400" dirty="0"/>
+              <a:t>仕組みになります。</a:t>
             </a:r>
             <a:endParaRPr lang="en-US" altLang="ja-JP" sz="2400" dirty="0"/>
           </a:p>
@@ -7845,7 +7881,7 @@
           <a:p>
             <a:r>
               <a:rPr lang="ja-JP" altLang="en-US" sz="2400" dirty="0"/>
-              <a:t>・部分的な挿入も同様に速い</a:t>
+              <a:t>・部分的な挿入が速い</a:t>
             </a:r>
             <a:endParaRPr lang="en-US" altLang="ja-JP" sz="2400" dirty="0"/>
           </a:p>
@@ -7877,7 +7913,7 @@
           <a:p>
             <a:r>
               <a:rPr lang="ja-JP" altLang="en-US" sz="2400" dirty="0"/>
-              <a:t>・配列よりもメモリ領域を多く使う</a:t>
+              <a:t>・１件分の容量は配列よりも多い</a:t>
             </a:r>
             <a:endParaRPr lang="en-US" altLang="ja-JP" sz="2400" dirty="0"/>
           </a:p>
@@ -11154,7 +11190,7 @@
         <p:spPr>
           <a:xfrm>
             <a:off x="567542" y="1216429"/>
-            <a:ext cx="7127272" cy="830997"/>
+            <a:ext cx="7263527" cy="830997"/>
           </a:xfrm>
           <a:prstGeom prst="rect">
             <a:avLst/>
@@ -11187,12 +11223,8 @@
           </a:p>
           <a:p>
             <a:r>
-              <a:rPr lang="en-US" altLang="ja-JP" sz="2400" dirty="0"/>
-              <a:t>1</a:t>
-            </a:r>
-            <a:r>
               <a:rPr lang="ja-JP" altLang="en-US" sz="2400" dirty="0"/>
-              <a:t>件分のデータサイズは配列よりも多くなります。</a:t>
+              <a:t>１件分のデータサイズは配列よりも多くなります。</a:t>
             </a:r>
             <a:endParaRPr lang="en-US" altLang="ja-JP" sz="2400" dirty="0"/>
           </a:p>

--- a/ゲーム科1年/01_後期/プログラミングⅢ/18_配列とリストの違い.pptx
+++ b/ゲーム科1年/01_後期/プログラミングⅢ/18_配列とリストの違い.pptx
@@ -269,7 +269,7 @@
           <a:p>
             <a:fld id="{E9CC885B-4903-4D54-9A93-00025F12DED9}" type="datetimeFigureOut">
               <a:rPr kumimoji="1" lang="ja-JP" altLang="en-US" smtClean="0"/>
-              <a:t>2025/3/3</a:t>
+              <a:t>2025/7/31</a:t>
             </a:fld>
             <a:endParaRPr kumimoji="1" lang="ja-JP" altLang="en-US"/>
           </a:p>
@@ -499,7 +499,7 @@
           <a:p>
             <a:fld id="{E9CC885B-4903-4D54-9A93-00025F12DED9}" type="datetimeFigureOut">
               <a:rPr kumimoji="1" lang="ja-JP" altLang="en-US" smtClean="0"/>
-              <a:t>2025/3/3</a:t>
+              <a:t>2025/7/31</a:t>
             </a:fld>
             <a:endParaRPr kumimoji="1" lang="ja-JP" altLang="en-US"/>
           </a:p>
@@ -739,7 +739,7 @@
           <a:p>
             <a:fld id="{E9CC885B-4903-4D54-9A93-00025F12DED9}" type="datetimeFigureOut">
               <a:rPr kumimoji="1" lang="ja-JP" altLang="en-US" smtClean="0"/>
-              <a:t>2025/3/3</a:t>
+              <a:t>2025/7/31</a:t>
             </a:fld>
             <a:endParaRPr kumimoji="1" lang="ja-JP" altLang="en-US"/>
           </a:p>
@@ -969,7 +969,7 @@
           <a:p>
             <a:fld id="{E9CC885B-4903-4D54-9A93-00025F12DED9}" type="datetimeFigureOut">
               <a:rPr kumimoji="1" lang="ja-JP" altLang="en-US" smtClean="0"/>
-              <a:t>2025/3/3</a:t>
+              <a:t>2025/7/31</a:t>
             </a:fld>
             <a:endParaRPr kumimoji="1" lang="ja-JP" altLang="en-US"/>
           </a:p>
@@ -1244,7 +1244,7 @@
           <a:p>
             <a:fld id="{E9CC885B-4903-4D54-9A93-00025F12DED9}" type="datetimeFigureOut">
               <a:rPr kumimoji="1" lang="ja-JP" altLang="en-US" smtClean="0"/>
-              <a:t>2025/3/3</a:t>
+              <a:t>2025/7/31</a:t>
             </a:fld>
             <a:endParaRPr kumimoji="1" lang="ja-JP" altLang="en-US"/>
           </a:p>
@@ -1573,7 +1573,7 @@
           <a:p>
             <a:fld id="{E9CC885B-4903-4D54-9A93-00025F12DED9}" type="datetimeFigureOut">
               <a:rPr kumimoji="1" lang="ja-JP" altLang="en-US" smtClean="0"/>
-              <a:t>2025/3/3</a:t>
+              <a:t>2025/7/31</a:t>
             </a:fld>
             <a:endParaRPr kumimoji="1" lang="ja-JP" altLang="en-US"/>
           </a:p>
@@ -2049,7 +2049,7 @@
           <a:p>
             <a:fld id="{E9CC885B-4903-4D54-9A93-00025F12DED9}" type="datetimeFigureOut">
               <a:rPr kumimoji="1" lang="ja-JP" altLang="en-US" smtClean="0"/>
-              <a:t>2025/3/3</a:t>
+              <a:t>2025/7/31</a:t>
             </a:fld>
             <a:endParaRPr kumimoji="1" lang="ja-JP" altLang="en-US"/>
           </a:p>
@@ -2190,7 +2190,7 @@
           <a:p>
             <a:fld id="{E9CC885B-4903-4D54-9A93-00025F12DED9}" type="datetimeFigureOut">
               <a:rPr kumimoji="1" lang="ja-JP" altLang="en-US" smtClean="0"/>
-              <a:t>2025/3/3</a:t>
+              <a:t>2025/7/31</a:t>
             </a:fld>
             <a:endParaRPr kumimoji="1" lang="ja-JP" altLang="en-US"/>
           </a:p>
@@ -2303,7 +2303,7 @@
           <a:p>
             <a:fld id="{E9CC885B-4903-4D54-9A93-00025F12DED9}" type="datetimeFigureOut">
               <a:rPr kumimoji="1" lang="ja-JP" altLang="en-US" smtClean="0"/>
-              <a:t>2025/3/3</a:t>
+              <a:t>2025/7/31</a:t>
             </a:fld>
             <a:endParaRPr kumimoji="1" lang="ja-JP" altLang="en-US"/>
           </a:p>
@@ -2646,7 +2646,7 @@
           <a:p>
             <a:fld id="{E9CC885B-4903-4D54-9A93-00025F12DED9}" type="datetimeFigureOut">
               <a:rPr kumimoji="1" lang="ja-JP" altLang="en-US" smtClean="0"/>
-              <a:t>2025/3/3</a:t>
+              <a:t>2025/7/31</a:t>
             </a:fld>
             <a:endParaRPr kumimoji="1" lang="ja-JP" altLang="en-US"/>
           </a:p>
@@ -2934,7 +2934,7 @@
           <a:p>
             <a:fld id="{E9CC885B-4903-4D54-9A93-00025F12DED9}" type="datetimeFigureOut">
               <a:rPr kumimoji="1" lang="ja-JP" altLang="en-US" smtClean="0"/>
-              <a:t>2025/3/3</a:t>
+              <a:t>2025/7/31</a:t>
             </a:fld>
             <a:endParaRPr kumimoji="1" lang="ja-JP" altLang="en-US"/>
           </a:p>
@@ -3207,7 +3207,7 @@
           <a:p>
             <a:fld id="{E9CC885B-4903-4D54-9A93-00025F12DED9}" type="datetimeFigureOut">
               <a:rPr kumimoji="1" lang="ja-JP" altLang="en-US" smtClean="0"/>
-              <a:t>2025/3/3</a:t>
+              <a:t>2025/7/31</a:t>
             </a:fld>
             <a:endParaRPr kumimoji="1" lang="ja-JP" altLang="en-US"/>
           </a:p>
